--- a/SkinCafeSunFunday/Skin-Cafe-Solution.pptx
+++ b/SkinCafeSunFunday/Skin-Cafe-Solution.pptx
@@ -5,32 +5,31 @@
     <p:sldMasterId id="2147484047" r:id="rId1"/>
   </p:sldMasterIdLst>
   <p:notesMasterIdLst>
-    <p:notesMasterId r:id="rId15"/>
+    <p:notesMasterId r:id="rId14"/>
   </p:notesMasterIdLst>
   <p:sldIdLst>
     <p:sldId id="269" r:id="rId2"/>
     <p:sldId id="267" r:id="rId3"/>
     <p:sldId id="276" r:id="rId4"/>
     <p:sldId id="268" r:id="rId5"/>
-    <p:sldId id="277" r:id="rId6"/>
-    <p:sldId id="270" r:id="rId7"/>
-    <p:sldId id="271" r:id="rId8"/>
-    <p:sldId id="272" r:id="rId9"/>
-    <p:sldId id="275" r:id="rId10"/>
-    <p:sldId id="273" r:id="rId11"/>
-    <p:sldId id="278" r:id="rId12"/>
-    <p:sldId id="279" r:id="rId13"/>
-    <p:sldId id="280" r:id="rId14"/>
+    <p:sldId id="270" r:id="rId6"/>
+    <p:sldId id="271" r:id="rId7"/>
+    <p:sldId id="272" r:id="rId8"/>
+    <p:sldId id="275" r:id="rId9"/>
+    <p:sldId id="273" r:id="rId10"/>
+    <p:sldId id="278" r:id="rId11"/>
+    <p:sldId id="279" r:id="rId12"/>
+    <p:sldId id="280" r:id="rId13"/>
   </p:sldIdLst>
   <p:sldSz cx="9144000" cy="5143500" type="screen16x9"/>
   <p:notesSz cx="5143500" cy="9144000"/>
   <p:embeddedFontLst>
     <p:embeddedFont>
       <p:font typeface="Calibri" panose="020F0502020204030204" pitchFamily="34" charset="0"/>
-      <p:regular r:id="rId16"/>
-      <p:bold r:id="rId17"/>
-      <p:italic r:id="rId18"/>
-      <p:boldItalic r:id="rId19"/>
+      <p:regular r:id="rId15"/>
+      <p:bold r:id="rId16"/>
+      <p:italic r:id="rId17"/>
+      <p:boldItalic r:id="rId18"/>
     </p:embeddedFont>
   </p:embeddedFontLst>
   <p:defaultTextStyle>
@@ -5463,569 +5462,6 @@
             <a:r>
               <a:rPr lang="en-US" sz="1400" b="1" dirty="0">
                 <a:solidFill>
-                  <a:schemeClr val="bg1">
-                    <a:lumMod val="75000"/>
-                  </a:schemeClr>
-                </a:solidFill>
-              </a:rPr>
-              <a:t>PLANNING</a:t>
-            </a:r>
-          </a:p>
-        </p:txBody>
-      </p:sp>
-      <p:sp>
-        <p:nvSpPr>
-          <p:cNvPr id="7" name="TextBox 6">
-            <a:extLst>
-              <a:ext uri="{FF2B5EF4-FFF2-40B4-BE49-F238E27FC236}">
-                <a16:creationId xmlns:a16="http://schemas.microsoft.com/office/drawing/2014/main" id="{50F4E563-BD54-4E32-A88D-87D41AD06854}"/>
-              </a:ext>
-            </a:extLst>
-          </p:cNvPr>
-          <p:cNvSpPr txBox="1"/>
-          <p:nvPr/>
-        </p:nvSpPr>
-        <p:spPr>
-          <a:xfrm>
-            <a:off x="4958247" y="4810426"/>
-            <a:ext cx="1233030" cy="307777"/>
-          </a:xfrm>
-          <a:prstGeom prst="rect">
-            <a:avLst/>
-          </a:prstGeom>
-          <a:noFill/>
-        </p:spPr>
-        <p:txBody>
-          <a:bodyPr wrap="none" rtlCol="0">
-            <a:spAutoFit/>
-          </a:bodyPr>
-          <a:lstStyle/>
-          <a:p>
-            <a:r>
-              <a:rPr lang="en-US" sz="1400" b="1" dirty="0">
-                <a:solidFill>
-                  <a:srgbClr val="00B0F0"/>
-                </a:solidFill>
-              </a:rPr>
-              <a:t>EXECUTION</a:t>
-            </a:r>
-          </a:p>
-        </p:txBody>
-      </p:sp>
-      <p:sp>
-        <p:nvSpPr>
-          <p:cNvPr id="8" name="TextBox 7">
-            <a:extLst>
-              <a:ext uri="{FF2B5EF4-FFF2-40B4-BE49-F238E27FC236}">
-                <a16:creationId xmlns:a16="http://schemas.microsoft.com/office/drawing/2014/main" id="{BB1B3FDA-4BC2-41CB-95C7-77ADA8EA704A}"/>
-              </a:ext>
-            </a:extLst>
-          </p:cNvPr>
-          <p:cNvSpPr txBox="1"/>
-          <p:nvPr/>
-        </p:nvSpPr>
-        <p:spPr>
-          <a:xfrm>
-            <a:off x="6890918" y="4810426"/>
-            <a:ext cx="1132939" cy="307777"/>
-          </a:xfrm>
-          <a:prstGeom prst="rect">
-            <a:avLst/>
-          </a:prstGeom>
-          <a:noFill/>
-        </p:spPr>
-        <p:txBody>
-          <a:bodyPr wrap="none" rtlCol="0">
-            <a:spAutoFit/>
-          </a:bodyPr>
-          <a:lstStyle/>
-          <a:p>
-            <a:r>
-              <a:rPr lang="en-US" sz="1400" b="1" dirty="0">
-                <a:solidFill>
-                  <a:schemeClr val="accent2">
-                    <a:lumMod val="75000"/>
-                  </a:schemeClr>
-                </a:solidFill>
-              </a:rPr>
-              <a:t>EVALUATION</a:t>
-            </a:r>
-          </a:p>
-        </p:txBody>
-      </p:sp>
-      <p:graphicFrame>
-        <p:nvGraphicFramePr>
-          <p:cNvPr id="10" name="Table 10">
-            <a:extLst>
-              <a:ext uri="{FF2B5EF4-FFF2-40B4-BE49-F238E27FC236}">
-                <a16:creationId xmlns:a16="http://schemas.microsoft.com/office/drawing/2014/main" id="{44DE0681-9430-4953-A4E7-553E4CE2B20B}"/>
-              </a:ext>
-            </a:extLst>
-          </p:cNvPr>
-          <p:cNvGraphicFramePr>
-            <a:graphicFrameLocks noGrp="1"/>
-          </p:cNvGraphicFramePr>
-          <p:nvPr>
-            <p:extLst>
-              <p:ext uri="{D42A27DB-BD31-4B8C-83A1-F6EECF244321}">
-                <p14:modId xmlns:p14="http://schemas.microsoft.com/office/powerpoint/2010/main" val="429796581"/>
-              </p:ext>
-            </p:extLst>
-          </p:nvPr>
-        </p:nvGraphicFramePr>
-        <p:xfrm>
-          <a:off x="709574" y="636423"/>
-          <a:ext cx="7768746" cy="3886200"/>
-        </p:xfrm>
-        <a:graphic>
-          <a:graphicData uri="http://schemas.openxmlformats.org/drawingml/2006/table">
-            <a:tbl>
-              <a:tblPr firstRow="1" bandRow="1">
-                <a:tableStyleId>{5C22544A-7EE6-4342-B048-85BDC9FD1C3A}</a:tableStyleId>
-              </a:tblPr>
-              <a:tblGrid>
-                <a:gridCol w="1294791">
-                  <a:extLst>
-                    <a:ext uri="{9D8B030D-6E8A-4147-A177-3AD203B41FA5}">
-                      <a16:colId xmlns:a16="http://schemas.microsoft.com/office/drawing/2014/main" val="2770539529"/>
-                    </a:ext>
-                  </a:extLst>
-                </a:gridCol>
-                <a:gridCol w="1294791">
-                  <a:extLst>
-                    <a:ext uri="{9D8B030D-6E8A-4147-A177-3AD203B41FA5}">
-                      <a16:colId xmlns:a16="http://schemas.microsoft.com/office/drawing/2014/main" val="200190852"/>
-                    </a:ext>
-                  </a:extLst>
-                </a:gridCol>
-                <a:gridCol w="1294791">
-                  <a:extLst>
-                    <a:ext uri="{9D8B030D-6E8A-4147-A177-3AD203B41FA5}">
-                      <a16:colId xmlns:a16="http://schemas.microsoft.com/office/drawing/2014/main" val="619854737"/>
-                    </a:ext>
-                  </a:extLst>
-                </a:gridCol>
-                <a:gridCol w="1294791">
-                  <a:extLst>
-                    <a:ext uri="{9D8B030D-6E8A-4147-A177-3AD203B41FA5}">
-                      <a16:colId xmlns:a16="http://schemas.microsoft.com/office/drawing/2014/main" val="4090901976"/>
-                    </a:ext>
-                  </a:extLst>
-                </a:gridCol>
-                <a:gridCol w="1294791">
-                  <a:extLst>
-                    <a:ext uri="{9D8B030D-6E8A-4147-A177-3AD203B41FA5}">
-                      <a16:colId xmlns:a16="http://schemas.microsoft.com/office/drawing/2014/main" val="191568447"/>
-                    </a:ext>
-                  </a:extLst>
-                </a:gridCol>
-                <a:gridCol w="1294791">
-                  <a:extLst>
-                    <a:ext uri="{9D8B030D-6E8A-4147-A177-3AD203B41FA5}">
-                      <a16:colId xmlns:a16="http://schemas.microsoft.com/office/drawing/2014/main" val="3764180427"/>
-                    </a:ext>
-                  </a:extLst>
-                </a:gridCol>
-              </a:tblGrid>
-              <a:tr h="476177">
-                <a:tc>
-                  <a:txBody>
-                    <a:bodyPr/>
-                    <a:lstStyle/>
-                    <a:p>
-                      <a:r>
-                        <a:rPr lang="en-US" dirty="0"/>
-                        <a:t>Quarter</a:t>
-                      </a:r>
-                    </a:p>
-                  </a:txBody>
-                  <a:tcPr>
-                    <a:solidFill>
-                      <a:schemeClr val="accent4">
-                        <a:lumMod val="75000"/>
-                      </a:schemeClr>
-                    </a:solidFill>
-                  </a:tcPr>
-                </a:tc>
-                <a:tc>
-                  <a:txBody>
-                    <a:bodyPr/>
-                    <a:lstStyle/>
-                    <a:p>
-                      <a:r>
-                        <a:rPr lang="en-US" dirty="0"/>
-                        <a:t>Strategic Theme</a:t>
-                      </a:r>
-                    </a:p>
-                  </a:txBody>
-                  <a:tcPr>
-                    <a:lnB w="38100" cmpd="sng">
-                      <a:noFill/>
-                    </a:lnB>
-                  </a:tcPr>
-                </a:tc>
-                <a:tc>
-                  <a:txBody>
-                    <a:bodyPr/>
-                    <a:lstStyle/>
-                    <a:p>
-                      <a:r>
-                        <a:rPr lang="en-US" dirty="0"/>
-                        <a:t>Product </a:t>
-                      </a:r>
-                    </a:p>
-                  </a:txBody>
-                  <a:tcPr/>
-                </a:tc>
-                <a:tc>
-                  <a:txBody>
-                    <a:bodyPr/>
-                    <a:lstStyle/>
-                    <a:p>
-                      <a:r>
-                        <a:rPr lang="en-US" dirty="0"/>
-                        <a:t>Price </a:t>
-                      </a:r>
-                    </a:p>
-                  </a:txBody>
-                  <a:tcPr/>
-                </a:tc>
-                <a:tc>
-                  <a:txBody>
-                    <a:bodyPr/>
-                    <a:lstStyle/>
-                    <a:p>
-                      <a:r>
-                        <a:rPr lang="en-US" dirty="0"/>
-                        <a:t>Place </a:t>
-                      </a:r>
-                    </a:p>
-                  </a:txBody>
-                  <a:tcPr/>
-                </a:tc>
-                <a:tc>
-                  <a:txBody>
-                    <a:bodyPr/>
-                    <a:lstStyle/>
-                    <a:p>
-                      <a:r>
-                        <a:rPr lang="en-US" dirty="0"/>
-                        <a:t>Promotion </a:t>
-                      </a:r>
-                    </a:p>
-                  </a:txBody>
-                  <a:tcPr/>
-                </a:tc>
-                <a:extLst>
-                  <a:ext uri="{0D108BD9-81ED-4DB2-BD59-A6C34878D82A}">
-                    <a16:rowId xmlns:a16="http://schemas.microsoft.com/office/drawing/2014/main" val="1185639670"/>
-                  </a:ext>
-                </a:extLst>
-              </a:tr>
-              <a:tr h="3203369">
-                <a:tc>
-                  <a:txBody>
-                    <a:bodyPr/>
-                    <a:lstStyle/>
-                    <a:p>
-                      <a:r>
-                        <a:rPr lang="en-US" dirty="0"/>
-                        <a:t>Q1</a:t>
-                      </a:r>
-                    </a:p>
-                    <a:p>
-                      <a:br>
-                        <a:rPr lang="en-US" dirty="0"/>
-                      </a:br>
-                      <a:r>
-                        <a:rPr lang="en-US" dirty="0"/>
-                        <a:t>(Jan–Mar)</a:t>
-                      </a:r>
-                    </a:p>
-                    <a:p>
-                      <a:endParaRPr lang="en-US" dirty="0"/>
-                    </a:p>
-                  </a:txBody>
-                  <a:tcPr>
-                    <a:lnR w="12700" cmpd="sng">
-                      <a:noFill/>
-                    </a:lnR>
-                  </a:tcPr>
-                </a:tc>
-                <a:tc>
-                  <a:txBody>
-                    <a:bodyPr/>
-                    <a:lstStyle/>
-                    <a:p>
-                      <a:r>
-                        <a:rPr lang="en-US" dirty="0"/>
-                        <a:t>The Winter-to-Spring Transition</a:t>
-                      </a:r>
-                    </a:p>
-                    <a:p>
-                      <a:endParaRPr lang="en-US" dirty="0"/>
-                    </a:p>
-                  </a:txBody>
-                  <a:tcPr>
-                    <a:lnL w="12700" cmpd="sng">
-                      <a:noFill/>
-                    </a:lnL>
-                    <a:lnR w="12700" cmpd="sng">
-                      <a:noFill/>
-                    </a:lnR>
-                    <a:lnT w="38100" cmpd="sng">
-                      <a:noFill/>
-                    </a:lnT>
-                    <a:lnB w="12700" cmpd="sng">
-                      <a:noFill/>
-                    </a:lnB>
-                    <a:lnTlToBr w="12700" cmpd="sng">
-                      <a:noFill/>
-                      <a:prstDash val="solid"/>
-                    </a:lnTlToBr>
-                    <a:lnBlToTr w="12700" cmpd="sng">
-                      <a:noFill/>
-                      <a:prstDash val="solid"/>
-                    </a:lnBlToTr>
-                  </a:tcPr>
-                </a:tc>
-                <a:tc>
-                  <a:txBody>
-                    <a:bodyPr/>
-                    <a:lstStyle/>
-                    <a:p>
-                      <a:r>
-                        <a:rPr lang="en-US" dirty="0"/>
-                        <a:t>Finalize batch production.</a:t>
-                      </a:r>
-                    </a:p>
-                    <a:p>
-                      <a:endParaRPr lang="en-US" dirty="0"/>
-                    </a:p>
-                    <a:p>
-                      <a:r>
-                        <a:rPr lang="en-US" dirty="0"/>
-                        <a:t>• Run shelf-life &amp; leakage stability audits on tubes.</a:t>
-                      </a:r>
-                    </a:p>
-                    <a:p>
-                      <a:endParaRPr lang="en-US" dirty="0"/>
-                    </a:p>
-                    <a:p>
-                      <a:r>
-                        <a:rPr lang="en-US" dirty="0"/>
-                        <a:t>Prepare travel/mini-size sample tubes.</a:t>
-                      </a:r>
-                    </a:p>
-                    <a:p>
-                      <a:endParaRPr lang="en-US" dirty="0"/>
-                    </a:p>
-                    <a:p>
-                      <a:endParaRPr lang="en-US" dirty="0"/>
-                    </a:p>
-                    <a:p>
-                      <a:endParaRPr lang="en-US" dirty="0"/>
-                    </a:p>
-                    <a:p>
-                      <a:endParaRPr lang="en-US" dirty="0"/>
-                    </a:p>
-                  </a:txBody>
-                  <a:tcPr>
-                    <a:lnL w="12700" cmpd="sng">
-                      <a:noFill/>
-                    </a:lnL>
-                  </a:tcPr>
-                </a:tc>
-                <a:tc>
-                  <a:txBody>
-                    <a:bodyPr/>
-                    <a:lstStyle/>
-                    <a:p>
-                      <a:r>
-                        <a:rPr lang="en-US" dirty="0"/>
-                        <a:t>• Anchor standard retail pricing (e.g., ৳650–৳700 range).</a:t>
-                      </a:r>
-                    </a:p>
-                    <a:p>
-                      <a:endParaRPr lang="en-US" dirty="0"/>
-                    </a:p>
-                    <a:p>
-                      <a:r>
-                        <a:rPr lang="en-US" dirty="0"/>
-                        <a:t>Lock in wholesale margins for beauty retailers.</a:t>
-                      </a:r>
-                    </a:p>
-                  </a:txBody>
-                  <a:tcPr/>
-                </a:tc>
-                <a:tc>
-                  <a:txBody>
-                    <a:bodyPr/>
-                    <a:lstStyle/>
-                    <a:p>
-                      <a:r>
-                        <a:rPr lang="en-US" dirty="0"/>
-                        <a:t>Partner with skincare e-commerce platforms (</a:t>
-                      </a:r>
-                      <a:r>
-                        <a:rPr lang="en-US" dirty="0" err="1"/>
-                        <a:t>Daraz</a:t>
-                      </a:r>
-                      <a:r>
-                        <a:rPr lang="en-US" dirty="0"/>
-                        <a:t>, The Mall BD, etc.).</a:t>
-                      </a:r>
-                    </a:p>
-                    <a:p>
-                      <a:endParaRPr lang="en-US" dirty="0"/>
-                    </a:p>
-                    <a:p>
-                      <a:r>
-                        <a:rPr lang="en-US" dirty="0"/>
-                        <a:t>Pitch to physical pharmacy &amp; beauty counters.</a:t>
-                      </a:r>
-                    </a:p>
-                  </a:txBody>
-                  <a:tcPr/>
-                </a:tc>
-                <a:tc>
-                  <a:txBody>
-                    <a:bodyPr/>
-                    <a:lstStyle/>
-                    <a:p>
-                      <a:r>
-                        <a:rPr lang="en-US" b="1" dirty="0"/>
-                        <a:t>The "Clouds Don't Block UV" Campaign:</a:t>
-                      </a:r>
-                      <a:r>
-                        <a:rPr lang="en-US" dirty="0"/>
-                        <a:t> Educate on indoor/winter UV damage.</a:t>
-                      </a:r>
-                    </a:p>
-                    <a:p>
-                      <a:endParaRPr lang="en-US" dirty="0"/>
-                    </a:p>
-                    <a:p>
-                      <a:r>
-                        <a:rPr lang="en-US" dirty="0"/>
-                        <a:t>Send PR seeding boxes to micro-influencers for honest formulation reviews.</a:t>
-                      </a:r>
-                    </a:p>
-                  </a:txBody>
-                  <a:tcPr/>
-                </a:tc>
-                <a:extLst>
-                  <a:ext uri="{0D108BD9-81ED-4DB2-BD59-A6C34878D82A}">
-                    <a16:rowId xmlns:a16="http://schemas.microsoft.com/office/drawing/2014/main" val="181864078"/>
-                  </a:ext>
-                </a:extLst>
-              </a:tr>
-            </a:tbl>
-          </a:graphicData>
-        </a:graphic>
-      </p:graphicFrame>
-    </p:spTree>
-    <p:extLst>
-      <p:ext uri="{BB962C8B-B14F-4D97-AF65-F5344CB8AC3E}">
-        <p14:creationId xmlns:p14="http://schemas.microsoft.com/office/powerpoint/2010/main" val="285735041"/>
-      </p:ext>
-    </p:extLst>
-  </p:cSld>
-  <p:clrMapOvr>
-    <a:masterClrMapping/>
-  </p:clrMapOvr>
-</p:sld>
-</file>
-
-<file path=ppt/slides/slide11.xml><?xml version="1.0" encoding="utf-8"?>
-<p:sld xmlns:a="http://schemas.openxmlformats.org/drawingml/2006/main" xmlns:r="http://schemas.openxmlformats.org/officeDocument/2006/relationships" xmlns:p="http://schemas.openxmlformats.org/presentationml/2006/main">
-  <p:cSld>
-    <p:spTree>
-      <p:nvGrpSpPr>
-        <p:cNvPr id="1" name=""/>
-        <p:cNvGrpSpPr/>
-        <p:nvPr/>
-      </p:nvGrpSpPr>
-      <p:grpSpPr>
-        <a:xfrm>
-          <a:off x="0" y="0"/>
-          <a:ext cx="0" cy="0"/>
-          <a:chOff x="0" y="0"/>
-          <a:chExt cx="0" cy="0"/>
-        </a:xfrm>
-      </p:grpSpPr>
-      <p:sp>
-        <p:nvSpPr>
-          <p:cNvPr id="5" name="TextBox 4">
-            <a:extLst>
-              <a:ext uri="{FF2B5EF4-FFF2-40B4-BE49-F238E27FC236}">
-                <a16:creationId xmlns:a16="http://schemas.microsoft.com/office/drawing/2014/main" id="{97F023A5-F4EA-4148-8471-CCDD1A9BCC6C}"/>
-              </a:ext>
-            </a:extLst>
-          </p:cNvPr>
-          <p:cNvSpPr txBox="1"/>
-          <p:nvPr/>
-        </p:nvSpPr>
-        <p:spPr>
-          <a:xfrm>
-            <a:off x="1062496" y="4810426"/>
-            <a:ext cx="1093569" cy="307777"/>
-          </a:xfrm>
-          <a:prstGeom prst="rect">
-            <a:avLst/>
-          </a:prstGeom>
-          <a:noFill/>
-        </p:spPr>
-        <p:txBody>
-          <a:bodyPr wrap="none" rtlCol="0">
-            <a:spAutoFit/>
-          </a:bodyPr>
-          <a:lstStyle/>
-          <a:p>
-            <a:r>
-              <a:rPr lang="en-US" sz="1400" b="1" dirty="0">
-                <a:solidFill>
-                  <a:schemeClr val="accent2">
-                    <a:lumMod val="75000"/>
-                  </a:schemeClr>
-                </a:solidFill>
-              </a:rPr>
-              <a:t>ANALYSIS</a:t>
-            </a:r>
-          </a:p>
-        </p:txBody>
-      </p:sp>
-      <p:sp>
-        <p:nvSpPr>
-          <p:cNvPr id="6" name="TextBox 5">
-            <a:extLst>
-              <a:ext uri="{FF2B5EF4-FFF2-40B4-BE49-F238E27FC236}">
-                <a16:creationId xmlns:a16="http://schemas.microsoft.com/office/drawing/2014/main" id="{EC0D99B3-794D-4D39-B91B-DDF258680845}"/>
-              </a:ext>
-            </a:extLst>
-          </p:cNvPr>
-          <p:cNvSpPr txBox="1"/>
-          <p:nvPr/>
-        </p:nvSpPr>
-        <p:spPr>
-          <a:xfrm>
-            <a:off x="2913414" y="4810426"/>
-            <a:ext cx="1122423" cy="307777"/>
-          </a:xfrm>
-          <a:prstGeom prst="rect">
-            <a:avLst/>
-          </a:prstGeom>
-          <a:noFill/>
-        </p:spPr>
-        <p:txBody>
-          <a:bodyPr wrap="none" rtlCol="0">
-            <a:spAutoFit/>
-          </a:bodyPr>
-          <a:lstStyle/>
-          <a:p>
-            <a:r>
-              <a:rPr lang="en-US" sz="1400" b="1" dirty="0">
-                <a:solidFill>
                   <a:schemeClr val="accent2">
                     <a:lumMod val="75000"/>
                   </a:schemeClr>
@@ -6336,7 +5772,7 @@
 </p:sld>
 </file>
 
-<file path=ppt/slides/slide12.xml><?xml version="1.0" encoding="utf-8"?>
+<file path=ppt/slides/slide11.xml><?xml version="1.0" encoding="utf-8"?>
 <p:sld xmlns:a="http://schemas.openxmlformats.org/drawingml/2006/main" xmlns:r="http://schemas.openxmlformats.org/officeDocument/2006/relationships" xmlns:p="http://schemas.openxmlformats.org/presentationml/2006/main">
   <p:cSld>
     <p:spTree>
@@ -7464,7 +6900,7 @@
 </p:sld>
 </file>
 
-<file path=ppt/slides/slide13.xml><?xml version="1.0" encoding="utf-8"?>
+<file path=ppt/slides/slide12.xml><?xml version="1.0" encoding="utf-8"?>
 <p:sld xmlns:a="http://schemas.openxmlformats.org/drawingml/2006/main" xmlns:r="http://schemas.openxmlformats.org/officeDocument/2006/relationships" xmlns:p="http://schemas.openxmlformats.org/presentationml/2006/main">
   <p:cSld>
     <p:spTree>
@@ -10064,357 +9500,6 @@
 </file>
 
 <file path=ppt/slides/slide5.xml><?xml version="1.0" encoding="utf-8"?>
-<p:sld xmlns:a="http://schemas.openxmlformats.org/drawingml/2006/main" xmlns:r="http://schemas.openxmlformats.org/officeDocument/2006/relationships" xmlns:p="http://schemas.openxmlformats.org/presentationml/2006/main">
-  <p:cSld>
-    <p:spTree>
-      <p:nvGrpSpPr>
-        <p:cNvPr id="1" name=""/>
-        <p:cNvGrpSpPr/>
-        <p:nvPr/>
-      </p:nvGrpSpPr>
-      <p:grpSpPr>
-        <a:xfrm>
-          <a:off x="0" y="0"/>
-          <a:ext cx="0" cy="0"/>
-          <a:chOff x="0" y="0"/>
-          <a:chExt cx="0" cy="0"/>
-        </a:xfrm>
-      </p:grpSpPr>
-      <p:sp>
-        <p:nvSpPr>
-          <p:cNvPr id="5" name="TextBox 4">
-            <a:extLst>
-              <a:ext uri="{FF2B5EF4-FFF2-40B4-BE49-F238E27FC236}">
-                <a16:creationId xmlns:a16="http://schemas.microsoft.com/office/drawing/2014/main" id="{97F023A5-F4EA-4148-8471-CCDD1A9BCC6C}"/>
-              </a:ext>
-            </a:extLst>
-          </p:cNvPr>
-          <p:cNvSpPr txBox="1"/>
-          <p:nvPr/>
-        </p:nvSpPr>
-        <p:spPr>
-          <a:xfrm>
-            <a:off x="1062496" y="4810426"/>
-            <a:ext cx="1093569" cy="307777"/>
-          </a:xfrm>
-          <a:prstGeom prst="rect">
-            <a:avLst/>
-          </a:prstGeom>
-          <a:noFill/>
-        </p:spPr>
-        <p:txBody>
-          <a:bodyPr wrap="none" rtlCol="0">
-            <a:spAutoFit/>
-          </a:bodyPr>
-          <a:lstStyle/>
-          <a:p>
-            <a:r>
-              <a:rPr lang="en-US" sz="1400" b="1" dirty="0">
-                <a:solidFill>
-                  <a:schemeClr val="accent2">
-                    <a:lumMod val="75000"/>
-                  </a:schemeClr>
-                </a:solidFill>
-              </a:rPr>
-              <a:t>ANALYSIS</a:t>
-            </a:r>
-          </a:p>
-        </p:txBody>
-      </p:sp>
-      <p:sp>
-        <p:nvSpPr>
-          <p:cNvPr id="6" name="TextBox 5">
-            <a:extLst>
-              <a:ext uri="{FF2B5EF4-FFF2-40B4-BE49-F238E27FC236}">
-                <a16:creationId xmlns:a16="http://schemas.microsoft.com/office/drawing/2014/main" id="{EC0D99B3-794D-4D39-B91B-DDF258680845}"/>
-              </a:ext>
-            </a:extLst>
-          </p:cNvPr>
-          <p:cNvSpPr txBox="1"/>
-          <p:nvPr/>
-        </p:nvSpPr>
-        <p:spPr>
-          <a:xfrm>
-            <a:off x="2913414" y="4810426"/>
-            <a:ext cx="1122423" cy="307777"/>
-          </a:xfrm>
-          <a:prstGeom prst="rect">
-            <a:avLst/>
-          </a:prstGeom>
-          <a:noFill/>
-        </p:spPr>
-        <p:txBody>
-          <a:bodyPr wrap="none" rtlCol="0">
-            <a:spAutoFit/>
-          </a:bodyPr>
-          <a:lstStyle/>
-          <a:p>
-            <a:r>
-              <a:rPr lang="en-US" sz="1400" b="1" dirty="0">
-                <a:solidFill>
-                  <a:srgbClr val="00B0F0"/>
-                </a:solidFill>
-              </a:rPr>
-              <a:t>PLANNING</a:t>
-            </a:r>
-          </a:p>
-        </p:txBody>
-      </p:sp>
-      <p:sp>
-        <p:nvSpPr>
-          <p:cNvPr id="7" name="TextBox 6">
-            <a:extLst>
-              <a:ext uri="{FF2B5EF4-FFF2-40B4-BE49-F238E27FC236}">
-                <a16:creationId xmlns:a16="http://schemas.microsoft.com/office/drawing/2014/main" id="{50F4E563-BD54-4E32-A88D-87D41AD06854}"/>
-              </a:ext>
-            </a:extLst>
-          </p:cNvPr>
-          <p:cNvSpPr txBox="1"/>
-          <p:nvPr/>
-        </p:nvSpPr>
-        <p:spPr>
-          <a:xfrm>
-            <a:off x="4958247" y="4810426"/>
-            <a:ext cx="1046056" cy="307777"/>
-          </a:xfrm>
-          <a:prstGeom prst="rect">
-            <a:avLst/>
-          </a:prstGeom>
-          <a:noFill/>
-        </p:spPr>
-        <p:txBody>
-          <a:bodyPr wrap="none" rtlCol="0">
-            <a:spAutoFit/>
-          </a:bodyPr>
-          <a:lstStyle/>
-          <a:p>
-            <a:r>
-              <a:rPr lang="en-US" sz="1400" b="1" dirty="0">
-                <a:solidFill>
-                  <a:schemeClr val="accent2">
-                    <a:lumMod val="65000"/>
-                  </a:schemeClr>
-                </a:solidFill>
-              </a:rPr>
-              <a:t>EXECUTION</a:t>
-            </a:r>
-          </a:p>
-        </p:txBody>
-      </p:sp>
-      <p:sp>
-        <p:nvSpPr>
-          <p:cNvPr id="8" name="TextBox 7">
-            <a:extLst>
-              <a:ext uri="{FF2B5EF4-FFF2-40B4-BE49-F238E27FC236}">
-                <a16:creationId xmlns:a16="http://schemas.microsoft.com/office/drawing/2014/main" id="{BB1B3FDA-4BC2-41CB-95C7-77ADA8EA704A}"/>
-              </a:ext>
-            </a:extLst>
-          </p:cNvPr>
-          <p:cNvSpPr txBox="1"/>
-          <p:nvPr/>
-        </p:nvSpPr>
-        <p:spPr>
-          <a:xfrm>
-            <a:off x="6890918" y="4810426"/>
-            <a:ext cx="1132939" cy="307777"/>
-          </a:xfrm>
-          <a:prstGeom prst="rect">
-            <a:avLst/>
-          </a:prstGeom>
-          <a:noFill/>
-        </p:spPr>
-        <p:txBody>
-          <a:bodyPr wrap="none" rtlCol="0">
-            <a:spAutoFit/>
-          </a:bodyPr>
-          <a:lstStyle/>
-          <a:p>
-            <a:r>
-              <a:rPr lang="en-US" sz="1400" b="1" dirty="0">
-                <a:solidFill>
-                  <a:schemeClr val="accent2">
-                    <a:lumMod val="75000"/>
-                  </a:schemeClr>
-                </a:solidFill>
-              </a:rPr>
-              <a:t>EVALUATION</a:t>
-            </a:r>
-          </a:p>
-        </p:txBody>
-      </p:sp>
-      <p:pic>
-        <p:nvPicPr>
-          <p:cNvPr id="1026" name="Picture 2" descr="Skin Cafe">
-            <a:extLst>
-              <a:ext uri="{FF2B5EF4-FFF2-40B4-BE49-F238E27FC236}">
-                <a16:creationId xmlns:a16="http://schemas.microsoft.com/office/drawing/2014/main" id="{D852E77B-35CD-423B-91B5-C525E6F9EEAC}"/>
-              </a:ext>
-            </a:extLst>
-          </p:cNvPr>
-          <p:cNvPicPr>
-            <a:picLocks noChangeAspect="1" noChangeArrowheads="1"/>
-          </p:cNvPicPr>
-          <p:nvPr/>
-        </p:nvPicPr>
-        <p:blipFill>
-          <a:blip r:embed="rId2">
-            <a:extLst>
-              <a:ext uri="{28A0092B-C50C-407E-A947-70E740481C1C}">
-                <a14:useLocalDpi xmlns:a14="http://schemas.microsoft.com/office/drawing/2010/main" val="0"/>
-              </a:ext>
-            </a:extLst>
-          </a:blip>
-          <a:srcRect/>
-          <a:stretch>
-            <a:fillRect/>
-          </a:stretch>
-        </p:blipFill>
-        <p:spPr bwMode="auto">
-          <a:xfrm>
-            <a:off x="8295437" y="138060"/>
-            <a:ext cx="680311" cy="681241"/>
-          </a:xfrm>
-          <a:prstGeom prst="rect">
-            <a:avLst/>
-          </a:prstGeom>
-          <a:noFill/>
-          <a:extLst>
-            <a:ext uri="{909E8E84-426E-40DD-AFC4-6F175D3DCCD1}">
-              <a14:hiddenFill xmlns:a14="http://schemas.microsoft.com/office/drawing/2010/main">
-                <a:solidFill>
-                  <a:srgbClr val="FFFFFF"/>
-                </a:solidFill>
-              </a14:hiddenFill>
-            </a:ext>
-          </a:extLst>
-        </p:spPr>
-      </p:pic>
-      <p:sp>
-        <p:nvSpPr>
-          <p:cNvPr id="2" name="TextBox 1">
-            <a:extLst>
-              <a:ext uri="{FF2B5EF4-FFF2-40B4-BE49-F238E27FC236}">
-                <a16:creationId xmlns:a16="http://schemas.microsoft.com/office/drawing/2014/main" id="{8AA0F6FE-1B21-4253-8713-7E59CDC3B1EC}"/>
-              </a:ext>
-            </a:extLst>
-          </p:cNvPr>
-          <p:cNvSpPr txBox="1"/>
-          <p:nvPr/>
-        </p:nvSpPr>
-        <p:spPr>
-          <a:xfrm>
-            <a:off x="2156065" y="1521562"/>
-            <a:ext cx="3954929" cy="646331"/>
-          </a:xfrm>
-          <a:prstGeom prst="rect">
-            <a:avLst/>
-          </a:prstGeom>
-          <a:noFill/>
-        </p:spPr>
-        <p:txBody>
-          <a:bodyPr wrap="none" rtlCol="0">
-            <a:spAutoFit/>
-          </a:bodyPr>
-          <a:lstStyle/>
-          <a:p>
-            <a:r>
-              <a:rPr lang="en-US" dirty="0"/>
-              <a:t>Strategic approach for trust building, </a:t>
-            </a:r>
-          </a:p>
-          <a:p>
-            <a:r>
-              <a:rPr lang="en-US" dirty="0"/>
-              <a:t>Core campaign idea and creativity </a:t>
-            </a:r>
-          </a:p>
-        </p:txBody>
-      </p:sp>
-      <p:sp>
-        <p:nvSpPr>
-          <p:cNvPr id="3" name="TextBox 2">
-            <a:extLst>
-              <a:ext uri="{FF2B5EF4-FFF2-40B4-BE49-F238E27FC236}">
-                <a16:creationId xmlns:a16="http://schemas.microsoft.com/office/drawing/2014/main" id="{6946C7AF-C217-4CA9-A4AB-2BCEAF465F39}"/>
-              </a:ext>
-            </a:extLst>
-          </p:cNvPr>
-          <p:cNvSpPr txBox="1"/>
-          <p:nvPr/>
-        </p:nvSpPr>
-        <p:spPr>
-          <a:xfrm>
-            <a:off x="2691994" y="2655418"/>
-            <a:ext cx="73152" cy="369332"/>
-          </a:xfrm>
-          <a:prstGeom prst="rect">
-            <a:avLst/>
-          </a:prstGeom>
-          <a:noFill/>
-        </p:spPr>
-        <p:txBody>
-          <a:bodyPr wrap="square" rtlCol="0">
-            <a:spAutoFit/>
-          </a:bodyPr>
-          <a:lstStyle/>
-          <a:p>
-            <a:r>
-              <a:rPr lang="en-US" dirty="0"/>
-              <a:t>    </a:t>
-            </a:r>
-          </a:p>
-        </p:txBody>
-      </p:sp>
-      <p:sp>
-        <p:nvSpPr>
-          <p:cNvPr id="4" name="TextBox 3">
-            <a:extLst>
-              <a:ext uri="{FF2B5EF4-FFF2-40B4-BE49-F238E27FC236}">
-                <a16:creationId xmlns:a16="http://schemas.microsoft.com/office/drawing/2014/main" id="{098D2DDC-8C0F-4078-8CB3-79C7B124C161}"/>
-              </a:ext>
-            </a:extLst>
-          </p:cNvPr>
-          <p:cNvSpPr txBox="1"/>
-          <p:nvPr/>
-        </p:nvSpPr>
-        <p:spPr>
-          <a:xfrm>
-            <a:off x="1265971" y="634635"/>
-            <a:ext cx="5735116" cy="369332"/>
-          </a:xfrm>
-          <a:prstGeom prst="rect">
-            <a:avLst/>
-          </a:prstGeom>
-          <a:noFill/>
-        </p:spPr>
-        <p:txBody>
-          <a:bodyPr wrap="square" rtlCol="0">
-            <a:spAutoFit/>
-          </a:bodyPr>
-          <a:lstStyle/>
-          <a:p>
-            <a:r>
-              <a:rPr lang="as-IN" dirty="0"/>
-              <a:t>রোদ থাকুক বাইরে, সুরক্ষা থাকুক ত্বকে</a:t>
-            </a:r>
-            <a:endParaRPr lang="en-US" dirty="0"/>
-          </a:p>
-        </p:txBody>
-      </p:sp>
-    </p:spTree>
-    <p:extLst>
-      <p:ext uri="{BB962C8B-B14F-4D97-AF65-F5344CB8AC3E}">
-        <p14:creationId xmlns:p14="http://schemas.microsoft.com/office/powerpoint/2010/main" val="512660404"/>
-      </p:ext>
-    </p:extLst>
-  </p:cSld>
-  <p:clrMapOvr>
-    <a:masterClrMapping/>
-  </p:clrMapOvr>
-</p:sld>
-</file>
-
-<file path=ppt/slides/slide6.xml><?xml version="1.0" encoding="utf-8"?>
 <p:sld xmlns:a="http://schemas.openxmlformats.org/drawingml/2006/main" xmlns:r="http://schemas.openxmlformats.org/officeDocument/2006/relationships" xmlns:p="http://schemas.openxmlformats.org/presentationml/2006/main">
   <p:cSld>
     <p:spTree>
@@ -11980,7 +11065,7 @@
 </p:sld>
 </file>
 
-<file path=ppt/slides/slide7.xml><?xml version="1.0" encoding="utf-8"?>
+<file path=ppt/slides/slide6.xml><?xml version="1.0" encoding="utf-8"?>
 <p:sld xmlns:a="http://schemas.openxmlformats.org/drawingml/2006/main" xmlns:r="http://schemas.openxmlformats.org/officeDocument/2006/relationships" xmlns:p="http://schemas.openxmlformats.org/presentationml/2006/main">
   <p:cSld>
     <p:spTree>
@@ -12444,7 +11529,7 @@
 </p:sld>
 </file>
 
-<file path=ppt/slides/slide8.xml><?xml version="1.0" encoding="utf-8"?>
+<file path=ppt/slides/slide7.xml><?xml version="1.0" encoding="utf-8"?>
 <p:sld xmlns:a="http://schemas.openxmlformats.org/drawingml/2006/main" xmlns:r="http://schemas.openxmlformats.org/officeDocument/2006/relationships" xmlns:p="http://schemas.openxmlformats.org/presentationml/2006/main">
   <p:cSld>
     <p:spTree>
@@ -13921,7 +13006,7 @@
 </p:sld>
 </file>
 
-<file path=ppt/slides/slide9.xml><?xml version="1.0" encoding="utf-8"?>
+<file path=ppt/slides/slide8.xml><?xml version="1.0" encoding="utf-8"?>
 <p:sld xmlns:a="http://schemas.openxmlformats.org/drawingml/2006/main" xmlns:r="http://schemas.openxmlformats.org/officeDocument/2006/relationships" xmlns:p="http://schemas.openxmlformats.org/presentationml/2006/main">
   <p:cSld>
     <p:spTree>
@@ -14405,6 +13490,960 @@
     <p:extLst>
       <p:ext uri="{BB962C8B-B14F-4D97-AF65-F5344CB8AC3E}">
         <p14:creationId xmlns:p14="http://schemas.microsoft.com/office/powerpoint/2010/main" val="1675924057"/>
+      </p:ext>
+    </p:extLst>
+  </p:cSld>
+  <p:clrMapOvr>
+    <a:masterClrMapping/>
+  </p:clrMapOvr>
+</p:sld>
+</file>
+
+<file path=ppt/slides/slide9.xml><?xml version="1.0" encoding="utf-8"?>
+<p:sld xmlns:a="http://schemas.openxmlformats.org/drawingml/2006/main" xmlns:r="http://schemas.openxmlformats.org/officeDocument/2006/relationships" xmlns:p="http://schemas.openxmlformats.org/presentationml/2006/main">
+  <p:cSld>
+    <p:spTree>
+      <p:nvGrpSpPr>
+        <p:cNvPr id="1" name=""/>
+        <p:cNvGrpSpPr/>
+        <p:nvPr/>
+      </p:nvGrpSpPr>
+      <p:grpSpPr>
+        <a:xfrm>
+          <a:off x="0" y="0"/>
+          <a:ext cx="0" cy="0"/>
+          <a:chOff x="0" y="0"/>
+          <a:chExt cx="0" cy="0"/>
+        </a:xfrm>
+      </p:grpSpPr>
+      <p:sp>
+        <p:nvSpPr>
+          <p:cNvPr id="5" name="TextBox 4">
+            <a:extLst>
+              <a:ext uri="{FF2B5EF4-FFF2-40B4-BE49-F238E27FC236}">
+                <a16:creationId xmlns:a16="http://schemas.microsoft.com/office/drawing/2014/main" id="{97F023A5-F4EA-4148-8471-CCDD1A9BCC6C}"/>
+              </a:ext>
+            </a:extLst>
+          </p:cNvPr>
+          <p:cNvSpPr txBox="1"/>
+          <p:nvPr/>
+        </p:nvSpPr>
+        <p:spPr>
+          <a:xfrm>
+            <a:off x="1062496" y="4810426"/>
+            <a:ext cx="1093569" cy="307777"/>
+          </a:xfrm>
+          <a:prstGeom prst="rect">
+            <a:avLst/>
+          </a:prstGeom>
+          <a:noFill/>
+        </p:spPr>
+        <p:txBody>
+          <a:bodyPr wrap="none" rtlCol="0">
+            <a:spAutoFit/>
+          </a:bodyPr>
+          <a:lstStyle/>
+          <a:p>
+            <a:r>
+              <a:rPr lang="en-US" sz="1400" b="1" dirty="0">
+                <a:solidFill>
+                  <a:schemeClr val="accent2">
+                    <a:lumMod val="75000"/>
+                  </a:schemeClr>
+                </a:solidFill>
+              </a:rPr>
+              <a:t>ANALYSIS</a:t>
+            </a:r>
+          </a:p>
+        </p:txBody>
+      </p:sp>
+      <p:sp>
+        <p:nvSpPr>
+          <p:cNvPr id="6" name="TextBox 5">
+            <a:extLst>
+              <a:ext uri="{FF2B5EF4-FFF2-40B4-BE49-F238E27FC236}">
+                <a16:creationId xmlns:a16="http://schemas.microsoft.com/office/drawing/2014/main" id="{EC0D99B3-794D-4D39-B91B-DDF258680845}"/>
+              </a:ext>
+            </a:extLst>
+          </p:cNvPr>
+          <p:cNvSpPr txBox="1"/>
+          <p:nvPr/>
+        </p:nvSpPr>
+        <p:spPr>
+          <a:xfrm>
+            <a:off x="2913414" y="4810426"/>
+            <a:ext cx="1122423" cy="307777"/>
+          </a:xfrm>
+          <a:prstGeom prst="rect">
+            <a:avLst/>
+          </a:prstGeom>
+          <a:noFill/>
+        </p:spPr>
+        <p:txBody>
+          <a:bodyPr wrap="none" rtlCol="0">
+            <a:spAutoFit/>
+          </a:bodyPr>
+          <a:lstStyle/>
+          <a:p>
+            <a:r>
+              <a:rPr lang="en-US" sz="1400" b="1" dirty="0">
+                <a:solidFill>
+                  <a:schemeClr val="bg1">
+                    <a:lumMod val="75000"/>
+                  </a:schemeClr>
+                </a:solidFill>
+              </a:rPr>
+              <a:t>PLANNING</a:t>
+            </a:r>
+          </a:p>
+        </p:txBody>
+      </p:sp>
+      <p:sp>
+        <p:nvSpPr>
+          <p:cNvPr id="7" name="TextBox 6">
+            <a:extLst>
+              <a:ext uri="{FF2B5EF4-FFF2-40B4-BE49-F238E27FC236}">
+                <a16:creationId xmlns:a16="http://schemas.microsoft.com/office/drawing/2014/main" id="{50F4E563-BD54-4E32-A88D-87D41AD06854}"/>
+              </a:ext>
+            </a:extLst>
+          </p:cNvPr>
+          <p:cNvSpPr txBox="1"/>
+          <p:nvPr/>
+        </p:nvSpPr>
+        <p:spPr>
+          <a:xfrm>
+            <a:off x="4958247" y="4810426"/>
+            <a:ext cx="1233030" cy="307777"/>
+          </a:xfrm>
+          <a:prstGeom prst="rect">
+            <a:avLst/>
+          </a:prstGeom>
+          <a:noFill/>
+        </p:spPr>
+        <p:txBody>
+          <a:bodyPr wrap="none" rtlCol="0">
+            <a:spAutoFit/>
+          </a:bodyPr>
+          <a:lstStyle/>
+          <a:p>
+            <a:r>
+              <a:rPr lang="en-US" sz="1400" b="1" dirty="0">
+                <a:solidFill>
+                  <a:srgbClr val="00B0F0"/>
+                </a:solidFill>
+              </a:rPr>
+              <a:t>EXECUTION</a:t>
+            </a:r>
+          </a:p>
+        </p:txBody>
+      </p:sp>
+      <p:sp>
+        <p:nvSpPr>
+          <p:cNvPr id="8" name="TextBox 7">
+            <a:extLst>
+              <a:ext uri="{FF2B5EF4-FFF2-40B4-BE49-F238E27FC236}">
+                <a16:creationId xmlns:a16="http://schemas.microsoft.com/office/drawing/2014/main" id="{BB1B3FDA-4BC2-41CB-95C7-77ADA8EA704A}"/>
+              </a:ext>
+            </a:extLst>
+          </p:cNvPr>
+          <p:cNvSpPr txBox="1"/>
+          <p:nvPr/>
+        </p:nvSpPr>
+        <p:spPr>
+          <a:xfrm>
+            <a:off x="6890918" y="4810426"/>
+            <a:ext cx="1132939" cy="307777"/>
+          </a:xfrm>
+          <a:prstGeom prst="rect">
+            <a:avLst/>
+          </a:prstGeom>
+          <a:noFill/>
+        </p:spPr>
+        <p:txBody>
+          <a:bodyPr wrap="none" rtlCol="0">
+            <a:spAutoFit/>
+          </a:bodyPr>
+          <a:lstStyle/>
+          <a:p>
+            <a:r>
+              <a:rPr lang="en-US" sz="1400" b="1" dirty="0">
+                <a:solidFill>
+                  <a:schemeClr val="accent2">
+                    <a:lumMod val="75000"/>
+                  </a:schemeClr>
+                </a:solidFill>
+              </a:rPr>
+              <a:t>EVALUATION</a:t>
+            </a:r>
+          </a:p>
+        </p:txBody>
+      </p:sp>
+      <p:graphicFrame>
+        <p:nvGraphicFramePr>
+          <p:cNvPr id="10" name="Table 10">
+            <a:extLst>
+              <a:ext uri="{FF2B5EF4-FFF2-40B4-BE49-F238E27FC236}">
+                <a16:creationId xmlns:a16="http://schemas.microsoft.com/office/drawing/2014/main" id="{44DE0681-9430-4953-A4E7-553E4CE2B20B}"/>
+              </a:ext>
+            </a:extLst>
+          </p:cNvPr>
+          <p:cNvGraphicFramePr>
+            <a:graphicFrameLocks noGrp="1"/>
+          </p:cNvGraphicFramePr>
+          <p:nvPr>
+            <p:extLst>
+              <p:ext uri="{D42A27DB-BD31-4B8C-83A1-F6EECF244321}">
+                <p14:modId xmlns:p14="http://schemas.microsoft.com/office/powerpoint/2010/main" val="1935112943"/>
+              </p:ext>
+            </p:extLst>
+          </p:nvPr>
+        </p:nvGraphicFramePr>
+        <p:xfrm>
+          <a:off x="607161" y="735635"/>
+          <a:ext cx="7929678" cy="3725305"/>
+        </p:xfrm>
+        <a:graphic>
+          <a:graphicData uri="http://schemas.openxmlformats.org/drawingml/2006/table">
+            <a:tbl>
+              <a:tblPr firstRow="1" firstCol="1" bandRow="1">
+                <a:tableStyleId>{17292A2E-F333-43FB-9621-5CBBE7FDCDCB}</a:tableStyleId>
+              </a:tblPr>
+              <a:tblGrid>
+                <a:gridCol w="1321613">
+                  <a:extLst>
+                    <a:ext uri="{9D8B030D-6E8A-4147-A177-3AD203B41FA5}">
+                      <a16:colId xmlns:a16="http://schemas.microsoft.com/office/drawing/2014/main" val="2770539529"/>
+                    </a:ext>
+                  </a:extLst>
+                </a:gridCol>
+                <a:gridCol w="1321613">
+                  <a:extLst>
+                    <a:ext uri="{9D8B030D-6E8A-4147-A177-3AD203B41FA5}">
+                      <a16:colId xmlns:a16="http://schemas.microsoft.com/office/drawing/2014/main" val="200190852"/>
+                    </a:ext>
+                  </a:extLst>
+                </a:gridCol>
+                <a:gridCol w="1321613">
+                  <a:extLst>
+                    <a:ext uri="{9D8B030D-6E8A-4147-A177-3AD203B41FA5}">
+                      <a16:colId xmlns:a16="http://schemas.microsoft.com/office/drawing/2014/main" val="619854737"/>
+                    </a:ext>
+                  </a:extLst>
+                </a:gridCol>
+                <a:gridCol w="1321613">
+                  <a:extLst>
+                    <a:ext uri="{9D8B030D-6E8A-4147-A177-3AD203B41FA5}">
+                      <a16:colId xmlns:a16="http://schemas.microsoft.com/office/drawing/2014/main" val="4090901976"/>
+                    </a:ext>
+                  </a:extLst>
+                </a:gridCol>
+                <a:gridCol w="1321613">
+                  <a:extLst>
+                    <a:ext uri="{9D8B030D-6E8A-4147-A177-3AD203B41FA5}">
+                      <a16:colId xmlns:a16="http://schemas.microsoft.com/office/drawing/2014/main" val="191568447"/>
+                    </a:ext>
+                  </a:extLst>
+                </a:gridCol>
+                <a:gridCol w="1321613">
+                  <a:extLst>
+                    <a:ext uri="{9D8B030D-6E8A-4147-A177-3AD203B41FA5}">
+                      <a16:colId xmlns:a16="http://schemas.microsoft.com/office/drawing/2014/main" val="3764180427"/>
+                    </a:ext>
+                  </a:extLst>
+                </a:gridCol>
+              </a:tblGrid>
+              <a:tr h="706692">
+                <a:tc>
+                  <a:txBody>
+                    <a:bodyPr/>
+                    <a:lstStyle/>
+                    <a:p>
+                      <a:r>
+                        <a:rPr lang="en-US" dirty="0">
+                          <a:solidFill>
+                            <a:schemeClr val="bg1"/>
+                          </a:solidFill>
+                        </a:rPr>
+                        <a:t>Quarter</a:t>
+                      </a:r>
+                    </a:p>
+                  </a:txBody>
+                  <a:tcPr anchor="ctr"/>
+                </a:tc>
+                <a:tc>
+                  <a:txBody>
+                    <a:bodyPr/>
+                    <a:lstStyle/>
+                    <a:p>
+                      <a:r>
+                        <a:rPr lang="en-US" dirty="0">
+                          <a:solidFill>
+                            <a:schemeClr val="bg1"/>
+                          </a:solidFill>
+                        </a:rPr>
+                        <a:t>Strategic Theme</a:t>
+                      </a:r>
+                    </a:p>
+                  </a:txBody>
+                  <a:tcPr anchor="ctr"/>
+                </a:tc>
+                <a:tc>
+                  <a:txBody>
+                    <a:bodyPr/>
+                    <a:lstStyle/>
+                    <a:p>
+                      <a:r>
+                        <a:rPr lang="en-US" dirty="0">
+                          <a:solidFill>
+                            <a:schemeClr val="bg1"/>
+                          </a:solidFill>
+                        </a:rPr>
+                        <a:t>Product </a:t>
+                      </a:r>
+                    </a:p>
+                  </a:txBody>
+                  <a:tcPr anchor="ctr"/>
+                </a:tc>
+                <a:tc>
+                  <a:txBody>
+                    <a:bodyPr/>
+                    <a:lstStyle/>
+                    <a:p>
+                      <a:r>
+                        <a:rPr lang="en-US" dirty="0">
+                          <a:solidFill>
+                            <a:schemeClr val="bg1"/>
+                          </a:solidFill>
+                        </a:rPr>
+                        <a:t>Price</a:t>
+                      </a:r>
+                      <a:r>
+                        <a:rPr lang="en-US" dirty="0">
+                          <a:solidFill>
+                            <a:schemeClr val="accent4">
+                              <a:lumMod val="75000"/>
+                            </a:schemeClr>
+                          </a:solidFill>
+                        </a:rPr>
+                        <a:t> </a:t>
+                      </a:r>
+                    </a:p>
+                  </a:txBody>
+                  <a:tcPr anchor="ctr"/>
+                </a:tc>
+                <a:tc>
+                  <a:txBody>
+                    <a:bodyPr/>
+                    <a:lstStyle/>
+                    <a:p>
+                      <a:r>
+                        <a:rPr lang="en-US" dirty="0">
+                          <a:solidFill>
+                            <a:schemeClr val="bg1"/>
+                          </a:solidFill>
+                        </a:rPr>
+                        <a:t>Place</a:t>
+                      </a:r>
+                      <a:r>
+                        <a:rPr lang="en-US" dirty="0">
+                          <a:solidFill>
+                            <a:schemeClr val="accent4">
+                              <a:lumMod val="75000"/>
+                            </a:schemeClr>
+                          </a:solidFill>
+                        </a:rPr>
+                        <a:t> </a:t>
+                      </a:r>
+                    </a:p>
+                  </a:txBody>
+                  <a:tcPr anchor="ctr"/>
+                </a:tc>
+                <a:tc>
+                  <a:txBody>
+                    <a:bodyPr/>
+                    <a:lstStyle/>
+                    <a:p>
+                      <a:r>
+                        <a:rPr lang="en-US" dirty="0">
+                          <a:solidFill>
+                            <a:schemeClr val="bg1"/>
+                          </a:solidFill>
+                        </a:rPr>
+                        <a:t>Promotion </a:t>
+                      </a:r>
+                    </a:p>
+                  </a:txBody>
+                  <a:tcPr anchor="ctr"/>
+                </a:tc>
+                <a:extLst>
+                  <a:ext uri="{0D108BD9-81ED-4DB2-BD59-A6C34878D82A}">
+                    <a16:rowId xmlns:a16="http://schemas.microsoft.com/office/drawing/2014/main" val="1185639670"/>
+                  </a:ext>
+                </a:extLst>
+              </a:tr>
+              <a:tr h="898537">
+                <a:tc>
+                  <a:txBody>
+                    <a:bodyPr/>
+                    <a:lstStyle/>
+                    <a:p>
+                      <a:pPr algn="ctr"/>
+                      <a:r>
+                        <a:rPr lang="en-US" dirty="0">
+                          <a:solidFill>
+                            <a:schemeClr val="accent4">
+                              <a:lumMod val="75000"/>
+                            </a:schemeClr>
+                          </a:solidFill>
+                        </a:rPr>
+                        <a:t>Q1(Jan–Mar)</a:t>
+                      </a:r>
+                    </a:p>
+                    <a:p>
+                      <a:endParaRPr lang="en-US" dirty="0">
+                        <a:solidFill>
+                          <a:schemeClr val="accent4">
+                            <a:lumMod val="75000"/>
+                          </a:schemeClr>
+                        </a:solidFill>
+                      </a:endParaRPr>
+                    </a:p>
+                  </a:txBody>
+                  <a:tcPr anchor="ctr"/>
+                </a:tc>
+                <a:tc>
+                  <a:txBody>
+                    <a:bodyPr/>
+                    <a:lstStyle/>
+                    <a:p>
+                      <a:pPr marL="0" indent="0">
+                        <a:buFont typeface="Arial" panose="020B0604020202020204" pitchFamily="34" charset="0"/>
+                        <a:buNone/>
+                      </a:pPr>
+                      <a:r>
+                        <a:rPr lang="en-US" dirty="0">
+                          <a:solidFill>
+                            <a:schemeClr val="accent4">
+                              <a:lumMod val="75000"/>
+                            </a:schemeClr>
+                          </a:solidFill>
+                        </a:rPr>
+                        <a:t>Trust Building</a:t>
+                      </a:r>
+                    </a:p>
+                  </a:txBody>
+                  <a:tcPr anchor="ctr"/>
+                </a:tc>
+                <a:tc>
+                  <a:txBody>
+                    <a:bodyPr/>
+                    <a:lstStyle/>
+                    <a:p>
+                      <a:r>
+                        <a:rPr lang="en-US" dirty="0">
+                          <a:solidFill>
+                            <a:schemeClr val="accent4">
+                              <a:lumMod val="75000"/>
+                            </a:schemeClr>
+                          </a:solidFill>
+                        </a:rPr>
+                        <a:t>Sample Packs</a:t>
+                      </a:r>
+                    </a:p>
+                  </a:txBody>
+                  <a:tcPr anchor="ctr"/>
+                </a:tc>
+                <a:tc>
+                  <a:txBody>
+                    <a:bodyPr/>
+                    <a:lstStyle/>
+                    <a:p>
+                      <a:r>
+                        <a:rPr lang="en-US" dirty="0">
+                          <a:solidFill>
+                            <a:schemeClr val="accent4">
+                              <a:lumMod val="75000"/>
+                            </a:schemeClr>
+                          </a:solidFill>
+                        </a:rPr>
+                        <a:t>Intro Pricing</a:t>
+                      </a:r>
+                    </a:p>
+                  </a:txBody>
+                  <a:tcPr anchor="ctr"/>
+                </a:tc>
+                <a:tc>
+                  <a:txBody>
+                    <a:bodyPr/>
+                    <a:lstStyle/>
+                    <a:p>
+                      <a:r>
+                        <a:rPr lang="en-US" dirty="0">
+                          <a:solidFill>
+                            <a:schemeClr val="accent4">
+                              <a:lumMod val="75000"/>
+                            </a:schemeClr>
+                          </a:solidFill>
+                        </a:rPr>
+                        <a:t>Campus Booths</a:t>
+                      </a:r>
+                    </a:p>
+                  </a:txBody>
+                  <a:tcPr anchor="ctr"/>
+                </a:tc>
+                <a:tc>
+                  <a:txBody>
+                    <a:bodyPr/>
+                    <a:lstStyle/>
+                    <a:p>
+                      <a:r>
+                        <a:rPr lang="en-US" dirty="0">
+                          <a:solidFill>
+                            <a:schemeClr val="accent4">
+                              <a:lumMod val="75000"/>
+                            </a:schemeClr>
+                          </a:solidFill>
+                        </a:rPr>
+                        <a:t>Influencer Reviews</a:t>
+                      </a:r>
+                    </a:p>
+                  </a:txBody>
+                  <a:tcPr anchor="ctr"/>
+                </a:tc>
+                <a:extLst>
+                  <a:ext uri="{0D108BD9-81ED-4DB2-BD59-A6C34878D82A}">
+                    <a16:rowId xmlns:a16="http://schemas.microsoft.com/office/drawing/2014/main" val="181864078"/>
+                  </a:ext>
+                </a:extLst>
+              </a:tr>
+              <a:tr h="706692">
+                <a:tc>
+                  <a:txBody>
+                    <a:bodyPr/>
+                    <a:lstStyle/>
+                    <a:p>
+                      <a:r>
+                        <a:rPr lang="en-US" dirty="0">
+                          <a:solidFill>
+                            <a:schemeClr val="accent4">
+                              <a:lumMod val="75000"/>
+                            </a:schemeClr>
+                          </a:solidFill>
+                        </a:rPr>
+                        <a:t>Q2 (Apr–Jun)</a:t>
+                      </a:r>
+                    </a:p>
+                  </a:txBody>
+                  <a:tcPr anchor="ctr"/>
+                </a:tc>
+                <a:tc>
+                  <a:txBody>
+                    <a:bodyPr/>
+                    <a:lstStyle/>
+                    <a:p>
+                      <a:r>
+                        <a:rPr lang="en-US" dirty="0">
+                          <a:solidFill>
+                            <a:schemeClr val="accent4">
+                              <a:lumMod val="75000"/>
+                            </a:schemeClr>
+                          </a:solidFill>
+                        </a:rPr>
+                        <a:t>Summer Protection</a:t>
+                      </a:r>
+                    </a:p>
+                  </a:txBody>
+                  <a:tcPr anchor="ctr"/>
+                </a:tc>
+                <a:tc>
+                  <a:txBody>
+                    <a:bodyPr/>
+                    <a:lstStyle/>
+                    <a:p>
+                      <a:r>
+                        <a:rPr lang="en-US" dirty="0">
+                          <a:solidFill>
+                            <a:schemeClr val="accent4">
+                              <a:lumMod val="75000"/>
+                            </a:schemeClr>
+                          </a:solidFill>
+                        </a:rPr>
+                        <a:t>SPF Bundles</a:t>
+                      </a:r>
+                    </a:p>
+                  </a:txBody>
+                  <a:tcPr anchor="ctr"/>
+                </a:tc>
+                <a:tc>
+                  <a:txBody>
+                    <a:bodyPr/>
+                    <a:lstStyle/>
+                    <a:p>
+                      <a:r>
+                        <a:rPr lang="en-US" dirty="0">
+                          <a:solidFill>
+                            <a:schemeClr val="accent4">
+                              <a:lumMod val="75000"/>
+                            </a:schemeClr>
+                          </a:solidFill>
+                        </a:rPr>
+                        <a:t>Combo Offers</a:t>
+                      </a:r>
+                    </a:p>
+                  </a:txBody>
+                  <a:tcPr anchor="ctr"/>
+                </a:tc>
+                <a:tc>
+                  <a:txBody>
+                    <a:bodyPr/>
+                    <a:lstStyle/>
+                    <a:p>
+                      <a:r>
+                        <a:rPr lang="en-US" dirty="0">
+                          <a:solidFill>
+                            <a:schemeClr val="accent4">
+                              <a:lumMod val="75000"/>
+                            </a:schemeClr>
+                          </a:solidFill>
+                        </a:rPr>
+                        <a:t>Retail Stores</a:t>
+                      </a:r>
+                    </a:p>
+                  </a:txBody>
+                  <a:tcPr anchor="ctr"/>
+                </a:tc>
+                <a:tc>
+                  <a:txBody>
+                    <a:bodyPr/>
+                    <a:lstStyle/>
+                    <a:p>
+                      <a:r>
+                        <a:rPr lang="en-US" dirty="0">
+                          <a:solidFill>
+                            <a:schemeClr val="accent4">
+                              <a:lumMod val="75000"/>
+                            </a:schemeClr>
+                          </a:solidFill>
+                        </a:rPr>
+                        <a:t>Social Media Campaign</a:t>
+                      </a:r>
+                    </a:p>
+                  </a:txBody>
+                  <a:tcPr anchor="ctr"/>
+                </a:tc>
+                <a:extLst>
+                  <a:ext uri="{0D108BD9-81ED-4DB2-BD59-A6C34878D82A}">
+                    <a16:rowId xmlns:a16="http://schemas.microsoft.com/office/drawing/2014/main" val="2660103378"/>
+                  </a:ext>
+                </a:extLst>
+              </a:tr>
+              <a:tr h="706692">
+                <a:tc>
+                  <a:txBody>
+                    <a:bodyPr/>
+                    <a:lstStyle/>
+                    <a:p>
+                      <a:r>
+                        <a:rPr lang="en-US" dirty="0">
+                          <a:solidFill>
+                            <a:schemeClr val="accent4">
+                              <a:lumMod val="75000"/>
+                            </a:schemeClr>
+                          </a:solidFill>
+                        </a:rPr>
+                        <a:t>Q3 (Jul–Sep)</a:t>
+                      </a:r>
+                    </a:p>
+                  </a:txBody>
+                  <a:tcPr anchor="ctr"/>
+                </a:tc>
+                <a:tc>
+                  <a:txBody>
+                    <a:bodyPr/>
+                    <a:lstStyle/>
+                    <a:p>
+                      <a:r>
+                        <a:rPr lang="en-US" dirty="0">
+                          <a:solidFill>
+                            <a:schemeClr val="accent4">
+                              <a:lumMod val="75000"/>
+                            </a:schemeClr>
+                          </a:solidFill>
+                        </a:rPr>
+                        <a:t>Daily Habit</a:t>
+                      </a:r>
+                    </a:p>
+                  </a:txBody>
+                  <a:tcPr anchor="ctr"/>
+                </a:tc>
+                <a:tc>
+                  <a:txBody>
+                    <a:bodyPr/>
+                    <a:lstStyle/>
+                    <a:p>
+                      <a:r>
+                        <a:rPr lang="en-US" dirty="0">
+                          <a:solidFill>
+                            <a:schemeClr val="accent4">
+                              <a:lumMod val="75000"/>
+                            </a:schemeClr>
+                          </a:solidFill>
+                        </a:rPr>
+                        <a:t>Travel Size</a:t>
+                      </a:r>
+                    </a:p>
+                  </a:txBody>
+                  <a:tcPr anchor="ctr"/>
+                </a:tc>
+                <a:tc>
+                  <a:txBody>
+                    <a:bodyPr/>
+                    <a:lstStyle/>
+                    <a:p>
+                      <a:r>
+                        <a:rPr lang="en-US" dirty="0">
+                          <a:solidFill>
+                            <a:schemeClr val="accent4">
+                              <a:lumMod val="75000"/>
+                            </a:schemeClr>
+                          </a:solidFill>
+                        </a:rPr>
+                        <a:t>Loyalty Deals</a:t>
+                      </a:r>
+                    </a:p>
+                  </a:txBody>
+                  <a:tcPr anchor="ctr"/>
+                </a:tc>
+                <a:tc>
+                  <a:txBody>
+                    <a:bodyPr/>
+                    <a:lstStyle/>
+                    <a:p>
+                      <a:r>
+                        <a:rPr lang="en-US" dirty="0">
+                          <a:solidFill>
+                            <a:schemeClr val="accent4">
+                              <a:lumMod val="75000"/>
+                            </a:schemeClr>
+                          </a:solidFill>
+                        </a:rPr>
+                        <a:t>Online Delivery</a:t>
+                      </a:r>
+                    </a:p>
+                  </a:txBody>
+                  <a:tcPr anchor="ctr"/>
+                </a:tc>
+                <a:tc>
+                  <a:txBody>
+                    <a:bodyPr/>
+                    <a:lstStyle/>
+                    <a:p>
+                      <a:r>
+                        <a:rPr lang="en-US" dirty="0">
+                          <a:solidFill>
+                            <a:schemeClr val="accent4">
+                              <a:lumMod val="75000"/>
+                            </a:schemeClr>
+                          </a:solidFill>
+                        </a:rPr>
+                        <a:t>Educational Reels</a:t>
+                      </a:r>
+                    </a:p>
+                  </a:txBody>
+                  <a:tcPr anchor="ctr"/>
+                </a:tc>
+                <a:extLst>
+                  <a:ext uri="{0D108BD9-81ED-4DB2-BD59-A6C34878D82A}">
+                    <a16:rowId xmlns:a16="http://schemas.microsoft.com/office/drawing/2014/main" val="163176056"/>
+                  </a:ext>
+                </a:extLst>
+              </a:tr>
+              <a:tr h="706692">
+                <a:tc>
+                  <a:txBody>
+                    <a:bodyPr/>
+                    <a:lstStyle/>
+                    <a:p>
+                      <a:r>
+                        <a:rPr lang="en-US" dirty="0">
+                          <a:solidFill>
+                            <a:schemeClr val="accent4">
+                              <a:lumMod val="75000"/>
+                            </a:schemeClr>
+                          </a:solidFill>
+                        </a:rPr>
+                        <a:t>Q4 (Oct–Dec)</a:t>
+                      </a:r>
+                    </a:p>
+                  </a:txBody>
+                  <a:tcPr anchor="ctr"/>
+                </a:tc>
+                <a:tc>
+                  <a:txBody>
+                    <a:bodyPr/>
+                    <a:lstStyle/>
+                    <a:p>
+                      <a:r>
+                        <a:rPr lang="en-US" dirty="0">
+                          <a:solidFill>
+                            <a:schemeClr val="accent4">
+                              <a:lumMod val="75000"/>
+                            </a:schemeClr>
+                          </a:solidFill>
+                        </a:rPr>
+                        <a:t>Brand Loyalty</a:t>
+                      </a:r>
+                    </a:p>
+                  </a:txBody>
+                  <a:tcPr anchor="ctr"/>
+                </a:tc>
+                <a:tc>
+                  <a:txBody>
+                    <a:bodyPr/>
+                    <a:lstStyle/>
+                    <a:p>
+                      <a:r>
+                        <a:rPr lang="en-US" dirty="0">
+                          <a:solidFill>
+                            <a:schemeClr val="accent4">
+                              <a:lumMod val="75000"/>
+                            </a:schemeClr>
+                          </a:solidFill>
+                        </a:rPr>
+                        <a:t>Family Packs</a:t>
+                      </a:r>
+                    </a:p>
+                  </a:txBody>
+                  <a:tcPr anchor="ctr"/>
+                </a:tc>
+                <a:tc>
+                  <a:txBody>
+                    <a:bodyPr/>
+                    <a:lstStyle/>
+                    <a:p>
+                      <a:r>
+                        <a:rPr lang="en-US" dirty="0">
+                          <a:solidFill>
+                            <a:schemeClr val="accent4">
+                              <a:lumMod val="75000"/>
+                            </a:schemeClr>
+                          </a:solidFill>
+                        </a:rPr>
+                        <a:t>Value Bundles</a:t>
+                      </a:r>
+                    </a:p>
+                  </a:txBody>
+                  <a:tcPr anchor="ctr"/>
+                </a:tc>
+                <a:tc>
+                  <a:txBody>
+                    <a:bodyPr/>
+                    <a:lstStyle/>
+                    <a:p>
+                      <a:r>
+                        <a:rPr lang="en-US" dirty="0">
+                          <a:solidFill>
+                            <a:schemeClr val="accent4">
+                              <a:lumMod val="75000"/>
+                            </a:schemeClr>
+                          </a:solidFill>
+                        </a:rPr>
+                        <a:t>Nationwide Push</a:t>
+                      </a:r>
+                    </a:p>
+                  </a:txBody>
+                  <a:tcPr anchor="ctr"/>
+                </a:tc>
+                <a:tc>
+                  <a:txBody>
+                    <a:bodyPr/>
+                    <a:lstStyle/>
+                    <a:p>
+                      <a:r>
+                        <a:rPr lang="en-US" dirty="0">
+                          <a:solidFill>
+                            <a:schemeClr val="accent4">
+                              <a:lumMod val="75000"/>
+                            </a:schemeClr>
+                          </a:solidFill>
+                        </a:rPr>
+                        <a:t>CSR Storytelling</a:t>
+                      </a:r>
+                    </a:p>
+                  </a:txBody>
+                  <a:tcPr anchor="ctr"/>
+                </a:tc>
+                <a:extLst>
+                  <a:ext uri="{0D108BD9-81ED-4DB2-BD59-A6C34878D82A}">
+                    <a16:rowId xmlns:a16="http://schemas.microsoft.com/office/drawing/2014/main" val="4058439709"/>
+                  </a:ext>
+                </a:extLst>
+              </a:tr>
+            </a:tbl>
+          </a:graphicData>
+        </a:graphic>
+      </p:graphicFrame>
+      <p:sp>
+        <p:nvSpPr>
+          <p:cNvPr id="9" name="Rectangle: Rounded Corners 8">
+            <a:extLst>
+              <a:ext uri="{FF2B5EF4-FFF2-40B4-BE49-F238E27FC236}">
+                <a16:creationId xmlns:a16="http://schemas.microsoft.com/office/drawing/2014/main" id="{775B86A9-8E93-473C-A439-EE57612CB43F}"/>
+              </a:ext>
+            </a:extLst>
+          </p:cNvPr>
+          <p:cNvSpPr/>
+          <p:nvPr/>
+        </p:nvSpPr>
+        <p:spPr>
+          <a:xfrm>
+            <a:off x="1816100" y="-99653"/>
+            <a:ext cx="5511800" cy="681241"/>
+          </a:xfrm>
+          <a:prstGeom prst="roundRect">
+            <a:avLst/>
+          </a:prstGeom>
+          <a:solidFill>
+            <a:schemeClr val="accent4">
+              <a:lumMod val="75000"/>
+            </a:schemeClr>
+          </a:solidFill>
+          <a:ln>
+            <a:noFill/>
+          </a:ln>
+        </p:spPr>
+        <p:style>
+          <a:lnRef idx="2">
+            <a:schemeClr val="accent1">
+              <a:shade val="50000"/>
+            </a:schemeClr>
+          </a:lnRef>
+          <a:fillRef idx="1">
+            <a:schemeClr val="accent1"/>
+          </a:fillRef>
+          <a:effectRef idx="0">
+            <a:schemeClr val="accent1"/>
+          </a:effectRef>
+          <a:fontRef idx="minor">
+            <a:schemeClr val="lt1"/>
+          </a:fontRef>
+        </p:style>
+        <p:txBody>
+          <a:bodyPr rtlCol="0" anchor="ctr"/>
+          <a:lstStyle/>
+          <a:p>
+            <a:pPr algn="ctr"/>
+            <a:r>
+              <a:rPr lang="en-US" sz="2400" b="1" dirty="0"/>
+              <a:t>12-Month Roadmap</a:t>
+            </a:r>
+          </a:p>
+        </p:txBody>
+      </p:sp>
+    </p:spTree>
+    <p:extLst>
+      <p:ext uri="{BB962C8B-B14F-4D97-AF65-F5344CB8AC3E}">
+        <p14:creationId xmlns:p14="http://schemas.microsoft.com/office/powerpoint/2010/main" val="285735041"/>
       </p:ext>
     </p:extLst>
   </p:cSld>
